--- a/public/fun/pack/pptx/birthdaypro/돌잔치프리미엄_04_감사인사중심_화이트골드.pptx
+++ b/public/fun/pack/pptx/birthdaypro/돌잔치프리미엄_04_감사인사중심_화이트골드.pptx
@@ -112,12 +112,12 @@
   <p:extLst>
     <p:ext uri="{521415D9-36F7-43E2-AB2F-B90AF26B5E84}">
       <p14:sectionLst xmlns:p14="http://schemas.microsoft.com/office/powerpoint/2010/main">
-        <p14:section name="시작" id="{B904586A-4872-420A-B89F-999C0738973B}">
+        <p14:section name="시작" id="{636E3365-CC90-4B73-8AFC-DA61190DF66D}">
           <p14:sldIdLst>
             <p14:sldId id="256"/>
           </p14:sldIdLst>
         </p14:section>
-        <p14:section name="본문" id="{C473819C-5491-4073-8B83-B09FFA37F8D7}">
+        <p14:section name="본문" id="{67B6DDC2-A75E-42B8-B8DC-B97CBC1FBAE6}">
           <p14:sldIdLst>
             <p14:sldId id="257"/>
             <p14:sldId id="258"/>
@@ -125,7 +125,7 @@
             <p14:sldId id="260"/>
           </p14:sldIdLst>
         </p14:section>
-        <p14:section name="마무리" id="{A456FD4F-4AC0-434F-9D13-9863CF985376}">
+        <p14:section name="마무리" id="{589CCFA9-F27D-431C-8E3B-DAC481B826A7}">
           <p14:sldIdLst>
             <p14:sldId id="261"/>
           </p14:sldIdLst>
@@ -1497,7 +1497,7 @@
             </a:lvl1pPr>
           </a:lstStyle>
           <a:p>
-            <a:fld id="{8F70FBD3-FF0E-4AB7-8F5C-51E9430FD55E}" type="slidenum">
+            <a:fld id="{4A6E32E4-8C70-4B72-8FF1-7D38ED65C447}" type="slidenum">
               <a:rPr lang="en-US"/>
               <a:t>‹#›</a:t>
             </a:fld>
@@ -2537,7 +2537,7 @@
             </a:lvl1pPr>
           </a:lstStyle>
           <a:p>
-            <a:fld id="{B57C2321-E3BE-41B3-8DC0-5599B6EA58C9}" type="slidenum">
+            <a:fld id="{162D6E3D-8A15-4ADF-BB6D-E3F9DDCDC7A2}" type="slidenum">
               <a:rPr lang="en-US"/>
               <a:t>‹#›</a:t>
             </a:fld>
@@ -3547,7 +3547,7 @@
             </a:lvl1pPr>
           </a:lstStyle>
           <a:p>
-            <a:fld id="{0D7858B8-91B1-4AF4-BAC2-4354080314BE}" type="slidenum">
+            <a:fld id="{BDACE0CC-9113-498E-BAB8-F51196DCFF4C}" type="slidenum">
               <a:rPr lang="en-US"/>
               <a:t>‹#›</a:t>
             </a:fld>
@@ -4710,7 +4710,7 @@
           <a:p>
             <a:r>
               <a:rPr lang="ko-KR"/>
-              <a:t>아기 이름 · 0000. 00. 00</a:t>
+              <a:t>아기 이름 · 날짜 입력</a:t>
             </a:r>
           </a:p>
           <a:p>
@@ -4871,7 +4871,7 @@
           <a:bodyPr/>
           <a:lstStyle/>
           <a:p>
-            <a:fld id="{6CB2A6BE-EF4E-4912-8EBE-184C39867B67}" type="slidenum">
+            <a:fld id="{05BAF274-8C7E-48C4-81AD-872218908ECA}" type="slidenum">
               <a:rPr lang="en-US"/>
               <a:t>‹#›</a:t>
             </a:fld>
@@ -5471,7 +5471,7 @@
           <a:bodyPr/>
           <a:lstStyle/>
           <a:p>
-            <a:fld id="{D481D2F1-B86E-4147-883F-20466E26513F}" type="slidenum">
+            <a:fld id="{2D043165-95A8-4BE9-8B91-E77E4E770326}" type="slidenum">
               <a:rPr lang="en-US"/>
               <a:t>‹#›</a:t>
             </a:fld>
@@ -5825,7 +5825,7 @@
           <a:bodyPr/>
           <a:lstStyle/>
           <a:p>
-            <a:fld id="{FEC97098-5C17-435D-B22C-048401972636}" type="slidenum">
+            <a:fld id="{50F8D8F9-676D-4769-B8A8-7429129F319D}" type="slidenum">
               <a:rPr lang="en-US"/>
               <a:t>‹#›</a:t>
             </a:fld>
@@ -6707,7 +6707,7 @@
           <a:bodyPr/>
           <a:lstStyle/>
           <a:p>
-            <a:fld id="{EFE54D95-8E7A-4E33-9DE9-14BE6573734A}" type="slidenum">
+            <a:fld id="{1353C13B-34DC-469B-9B40-57C7939D8E3A}" type="slidenum">
               <a:rPr lang="en-US"/>
               <a:t>‹#›</a:t>
             </a:fld>
